--- a/Pseudo E-Challan System.pptx
+++ b/Pseudo E-Challan System.pptx
@@ -332,7 +332,7 @@
             <a:fld id="{1D8BD707-D9CF-40AE-B4C6-C98DA3205C09}" type="datetimeFigureOut">
               <a:rPr lang="en-US" smtClean="0"/>
               <a:pPr/>
-              <a:t>11/29/2025</a:t>
+              <a:t>11/30/2025</a:t>
             </a:fld>
             <a:endParaRPr lang="en-US"/>
           </a:p>
@@ -499,7 +499,7 @@
             <a:fld id="{1D8BD707-D9CF-40AE-B4C6-C98DA3205C09}" type="datetimeFigureOut">
               <a:rPr lang="en-US" smtClean="0"/>
               <a:pPr/>
-              <a:t>11/29/2025</a:t>
+              <a:t>11/30/2025</a:t>
             </a:fld>
             <a:endParaRPr lang="en-US"/>
           </a:p>
@@ -676,7 +676,7 @@
             <a:fld id="{1D8BD707-D9CF-40AE-B4C6-C98DA3205C09}" type="datetimeFigureOut">
               <a:rPr lang="en-US" smtClean="0"/>
               <a:pPr/>
-              <a:t>11/29/2025</a:t>
+              <a:t>11/30/2025</a:t>
             </a:fld>
             <a:endParaRPr lang="en-US"/>
           </a:p>
@@ -843,7 +843,7 @@
             <a:fld id="{1D8BD707-D9CF-40AE-B4C6-C98DA3205C09}" type="datetimeFigureOut">
               <a:rPr lang="en-US" smtClean="0"/>
               <a:pPr/>
-              <a:t>11/29/2025</a:t>
+              <a:t>11/30/2025</a:t>
             </a:fld>
             <a:endParaRPr lang="en-US"/>
           </a:p>
@@ -1086,7 +1086,7 @@
             <a:fld id="{1D8BD707-D9CF-40AE-B4C6-C98DA3205C09}" type="datetimeFigureOut">
               <a:rPr lang="en-US" smtClean="0"/>
               <a:pPr/>
-              <a:t>11/29/2025</a:t>
+              <a:t>11/30/2025</a:t>
             </a:fld>
             <a:endParaRPr lang="en-US"/>
           </a:p>
@@ -1371,7 +1371,7 @@
             <a:fld id="{1D8BD707-D9CF-40AE-B4C6-C98DA3205C09}" type="datetimeFigureOut">
               <a:rPr lang="en-US" smtClean="0"/>
               <a:pPr/>
-              <a:t>11/29/2025</a:t>
+              <a:t>11/30/2025</a:t>
             </a:fld>
             <a:endParaRPr lang="en-US"/>
           </a:p>
@@ -1790,7 +1790,7 @@
             <a:fld id="{1D8BD707-D9CF-40AE-B4C6-C98DA3205C09}" type="datetimeFigureOut">
               <a:rPr lang="en-US" smtClean="0"/>
               <a:pPr/>
-              <a:t>11/29/2025</a:t>
+              <a:t>11/30/2025</a:t>
             </a:fld>
             <a:endParaRPr lang="en-US"/>
           </a:p>
@@ -1905,7 +1905,7 @@
             <a:fld id="{1D8BD707-D9CF-40AE-B4C6-C98DA3205C09}" type="datetimeFigureOut">
               <a:rPr lang="en-US" smtClean="0"/>
               <a:pPr/>
-              <a:t>11/29/2025</a:t>
+              <a:t>11/30/2025</a:t>
             </a:fld>
             <a:endParaRPr lang="en-US"/>
           </a:p>
@@ -1997,7 +1997,7 @@
             <a:fld id="{1D8BD707-D9CF-40AE-B4C6-C98DA3205C09}" type="datetimeFigureOut">
               <a:rPr lang="en-US" smtClean="0"/>
               <a:pPr/>
-              <a:t>11/29/2025</a:t>
+              <a:t>11/30/2025</a:t>
             </a:fld>
             <a:endParaRPr lang="en-US"/>
           </a:p>
@@ -2271,7 +2271,7 @@
             <a:fld id="{1D8BD707-D9CF-40AE-B4C6-C98DA3205C09}" type="datetimeFigureOut">
               <a:rPr lang="en-US" smtClean="0"/>
               <a:pPr/>
-              <a:t>11/29/2025</a:t>
+              <a:t>11/30/2025</a:t>
             </a:fld>
             <a:endParaRPr lang="en-US"/>
           </a:p>
@@ -2521,7 +2521,7 @@
             <a:fld id="{1D8BD707-D9CF-40AE-B4C6-C98DA3205C09}" type="datetimeFigureOut">
               <a:rPr lang="en-US" smtClean="0"/>
               <a:pPr/>
-              <a:t>11/29/2025</a:t>
+              <a:t>11/30/2025</a:t>
             </a:fld>
             <a:endParaRPr lang="en-US"/>
           </a:p>
@@ -2731,7 +2731,7 @@
             <a:fld id="{1D8BD707-D9CF-40AE-B4C6-C98DA3205C09}" type="datetimeFigureOut">
               <a:rPr lang="en-US" smtClean="0"/>
               <a:pPr/>
-              <a:t>11/29/2025</a:t>
+              <a:t>11/30/2025</a:t>
             </a:fld>
             <a:endParaRPr lang="en-US"/>
           </a:p>
@@ -3245,7 +3245,7 @@
             <a:blip r:embed="rId3">
               <a:extLst>
                 <a:ext uri="{96DAC541-7B7A-43D3-8B79-37D633B846F1}">
-                  <asvg:svgBlip xmlns="" xmlns:asvg="http://schemas.microsoft.com/office/drawing/2016/SVG/main" r:embed="rId4"/>
+                  <asvg:svgBlip xmlns:asvg="http://schemas.microsoft.com/office/drawing/2016/SVG/main" xmlns="" r:embed="rId4"/>
                 </a:ext>
               </a:extLst>
             </a:blip>
@@ -3297,7 +3297,7 @@
             <a:blip r:embed="rId5">
               <a:extLst>
                 <a:ext uri="{96DAC541-7B7A-43D3-8B79-37D633B846F1}">
-                  <asvg:svgBlip xmlns="" xmlns:asvg="http://schemas.microsoft.com/office/drawing/2016/SVG/main" r:embed="rId6"/>
+                  <asvg:svgBlip xmlns:asvg="http://schemas.microsoft.com/office/drawing/2016/SVG/main" xmlns="" r:embed="rId6"/>
                 </a:ext>
               </a:extLst>
             </a:blip>
@@ -3349,7 +3349,7 @@
             <a:blip r:embed="rId7">
               <a:extLst>
                 <a:ext uri="{96DAC541-7B7A-43D3-8B79-37D633B846F1}">
-                  <asvg:svgBlip xmlns="" xmlns:asvg="http://schemas.microsoft.com/office/drawing/2016/SVG/main" r:embed="rId8"/>
+                  <asvg:svgBlip xmlns:asvg="http://schemas.microsoft.com/office/drawing/2016/SVG/main" xmlns="" r:embed="rId8"/>
                 </a:ext>
               </a:extLst>
             </a:blip>
@@ -3415,7 +3415,7 @@
               <a:blip r:embed="rId9">
                 <a:extLst>
                   <a:ext uri="{96DAC541-7B7A-43D3-8B79-37D633B846F1}">
-                    <asvg:svgBlip xmlns="" xmlns:asvg="http://schemas.microsoft.com/office/drawing/2016/SVG/main" r:embed="rId10"/>
+                    <asvg:svgBlip xmlns:asvg="http://schemas.microsoft.com/office/drawing/2016/SVG/main" xmlns="" r:embed="rId10"/>
                   </a:ext>
                 </a:extLst>
               </a:blip>
@@ -3919,7 +3919,7 @@
             <a:blip r:embed="rId2">
               <a:extLst>
                 <a:ext uri="{96DAC541-7B7A-43D3-8B79-37D633B846F1}">
-                  <asvg:svgBlip xmlns="" xmlns:asvg="http://schemas.microsoft.com/office/drawing/2016/SVG/main" r:embed="rId3"/>
+                  <asvg:svgBlip xmlns:asvg="http://schemas.microsoft.com/office/drawing/2016/SVG/main" xmlns="" r:embed="rId3"/>
                 </a:ext>
               </a:extLst>
             </a:blip>
@@ -4117,7 +4117,7 @@
               <a:blip r:embed="rId4">
                 <a:extLst>
                   <a:ext uri="{96DAC541-7B7A-43D3-8B79-37D633B846F1}">
-                    <asvg:svgBlip xmlns="" xmlns:asvg="http://schemas.microsoft.com/office/drawing/2016/SVG/main" r:embed="rId5"/>
+                    <asvg:svgBlip xmlns:asvg="http://schemas.microsoft.com/office/drawing/2016/SVG/main" xmlns="" r:embed="rId5"/>
                   </a:ext>
                 </a:extLst>
               </a:blip>
@@ -4170,7 +4170,7 @@
             <a:blip r:embed="rId2">
               <a:extLst>
                 <a:ext uri="{96DAC541-7B7A-43D3-8B79-37D633B846F1}">
-                  <asvg:svgBlip xmlns="" xmlns:asvg="http://schemas.microsoft.com/office/drawing/2016/SVG/main" r:embed="rId3"/>
+                  <asvg:svgBlip xmlns:asvg="http://schemas.microsoft.com/office/drawing/2016/SVG/main" xmlns="" r:embed="rId3"/>
                 </a:ext>
               </a:extLst>
             </a:blip>
@@ -4222,7 +4222,7 @@
             <a:blip r:embed="rId2">
               <a:extLst>
                 <a:ext uri="{96DAC541-7B7A-43D3-8B79-37D633B846F1}">
-                  <asvg:svgBlip xmlns="" xmlns:asvg="http://schemas.microsoft.com/office/drawing/2016/SVG/main" r:embed="rId3"/>
+                  <asvg:svgBlip xmlns:asvg="http://schemas.microsoft.com/office/drawing/2016/SVG/main" xmlns="" r:embed="rId3"/>
                 </a:ext>
               </a:extLst>
             </a:blip>
@@ -5044,7 +5044,7 @@
             <a:blip r:embed="rId2">
               <a:extLst>
                 <a:ext uri="{96DAC541-7B7A-43D3-8B79-37D633B846F1}">
-                  <asvg:svgBlip xmlns="" xmlns:asvg="http://schemas.microsoft.com/office/drawing/2016/SVG/main" r:embed="rId3"/>
+                  <asvg:svgBlip xmlns:asvg="http://schemas.microsoft.com/office/drawing/2016/SVG/main" xmlns="" r:embed="rId3"/>
                 </a:ext>
               </a:extLst>
             </a:blip>
@@ -5242,7 +5242,7 @@
               <a:blip r:embed="rId4">
                 <a:extLst>
                   <a:ext uri="{96DAC541-7B7A-43D3-8B79-37D633B846F1}">
-                    <asvg:svgBlip xmlns="" xmlns:asvg="http://schemas.microsoft.com/office/drawing/2016/SVG/main" r:embed="rId5"/>
+                    <asvg:svgBlip xmlns:asvg="http://schemas.microsoft.com/office/drawing/2016/SVG/main" xmlns="" r:embed="rId5"/>
                   </a:ext>
                 </a:extLst>
               </a:blip>
@@ -5295,7 +5295,7 @@
             <a:blip r:embed="rId2">
               <a:extLst>
                 <a:ext uri="{96DAC541-7B7A-43D3-8B79-37D633B846F1}">
-                  <asvg:svgBlip xmlns="" xmlns:asvg="http://schemas.microsoft.com/office/drawing/2016/SVG/main" r:embed="rId3"/>
+                  <asvg:svgBlip xmlns:asvg="http://schemas.microsoft.com/office/drawing/2016/SVG/main" xmlns="" r:embed="rId3"/>
                 </a:ext>
               </a:extLst>
             </a:blip>
@@ -5347,7 +5347,7 @@
             <a:blip r:embed="rId2">
               <a:extLst>
                 <a:ext uri="{96DAC541-7B7A-43D3-8B79-37D633B846F1}">
-                  <asvg:svgBlip xmlns="" xmlns:asvg="http://schemas.microsoft.com/office/drawing/2016/SVG/main" r:embed="rId3"/>
+                  <asvg:svgBlip xmlns:asvg="http://schemas.microsoft.com/office/drawing/2016/SVG/main" xmlns="" r:embed="rId3"/>
                 </a:ext>
               </a:extLst>
             </a:blip>
@@ -6406,7 +6406,7 @@
             <a:blip r:embed="rId4">
               <a:extLst>
                 <a:ext uri="{96DAC541-7B7A-43D3-8B79-37D633B846F1}">
-                  <asvg:svgBlip xmlns="" xmlns:asvg="http://schemas.microsoft.com/office/drawing/2016/SVG/main" r:embed="rId5"/>
+                  <asvg:svgBlip xmlns:asvg="http://schemas.microsoft.com/office/drawing/2016/SVG/main" xmlns="" r:embed="rId5"/>
                 </a:ext>
               </a:extLst>
             </a:blip>
@@ -6871,7 +6871,7 @@
             <a:blip r:embed="rId2">
               <a:extLst>
                 <a:ext uri="{96DAC541-7B7A-43D3-8B79-37D633B846F1}">
-                  <asvg:svgBlip xmlns="" xmlns:asvg="http://schemas.microsoft.com/office/drawing/2016/SVG/main" r:embed="rId3"/>
+                  <asvg:svgBlip xmlns:asvg="http://schemas.microsoft.com/office/drawing/2016/SVG/main" xmlns="" r:embed="rId3"/>
                 </a:ext>
               </a:extLst>
             </a:blip>
@@ -6926,7 +6926,7 @@
             <a:blip r:embed="rId2">
               <a:extLst>
                 <a:ext uri="{96DAC541-7B7A-43D3-8B79-37D633B846F1}">
-                  <asvg:svgBlip xmlns="" xmlns:asvg="http://schemas.microsoft.com/office/drawing/2016/SVG/main" r:embed="rId3"/>
+                  <asvg:svgBlip xmlns:asvg="http://schemas.microsoft.com/office/drawing/2016/SVG/main" xmlns="" r:embed="rId3"/>
                 </a:ext>
               </a:extLst>
             </a:blip>
@@ -6981,7 +6981,7 @@
             <a:blip r:embed="rId2">
               <a:extLst>
                 <a:ext uri="{96DAC541-7B7A-43D3-8B79-37D633B846F1}">
-                  <asvg:svgBlip xmlns="" xmlns:asvg="http://schemas.microsoft.com/office/drawing/2016/SVG/main" r:embed="rId3"/>
+                  <asvg:svgBlip xmlns:asvg="http://schemas.microsoft.com/office/drawing/2016/SVG/main" xmlns="" r:embed="rId3"/>
                 </a:ext>
               </a:extLst>
             </a:blip>
@@ -7082,7 +7082,7 @@
             <a:blip r:embed="rId5">
               <a:extLst>
                 <a:ext uri="{96DAC541-7B7A-43D3-8B79-37D633B846F1}">
-                  <asvg:svgBlip xmlns="" xmlns:asvg="http://schemas.microsoft.com/office/drawing/2016/SVG/main" r:embed="rId6"/>
+                  <asvg:svgBlip xmlns:asvg="http://schemas.microsoft.com/office/drawing/2016/SVG/main" xmlns="" r:embed="rId6"/>
                 </a:ext>
               </a:extLst>
             </a:blip>
@@ -7134,7 +7134,7 @@
             <a:blip r:embed="rId5">
               <a:extLst>
                 <a:ext uri="{96DAC541-7B7A-43D3-8B79-37D633B846F1}">
-                  <asvg:svgBlip xmlns="" xmlns:asvg="http://schemas.microsoft.com/office/drawing/2016/SVG/main" r:embed="rId6"/>
+                  <asvg:svgBlip xmlns:asvg="http://schemas.microsoft.com/office/drawing/2016/SVG/main" xmlns="" r:embed="rId6"/>
                 </a:ext>
               </a:extLst>
             </a:blip>
@@ -7431,7 +7431,7 @@
             <a:blip r:embed="rId2">
               <a:extLst>
                 <a:ext uri="{96DAC541-7B7A-43D3-8B79-37D633B846F1}">
-                  <asvg:svgBlip xmlns="" xmlns:asvg="http://schemas.microsoft.com/office/drawing/2016/SVG/main" r:embed="rId3"/>
+                  <asvg:svgBlip xmlns:asvg="http://schemas.microsoft.com/office/drawing/2016/SVG/main" xmlns="" r:embed="rId3"/>
                 </a:ext>
               </a:extLst>
             </a:blip>
@@ -7483,7 +7483,7 @@
             <a:blip r:embed="rId4">
               <a:extLst>
                 <a:ext uri="{96DAC541-7B7A-43D3-8B79-37D633B846F1}">
-                  <asvg:svgBlip xmlns="" xmlns:asvg="http://schemas.microsoft.com/office/drawing/2016/SVG/main" r:embed="rId5"/>
+                  <asvg:svgBlip xmlns:asvg="http://schemas.microsoft.com/office/drawing/2016/SVG/main" xmlns="" r:embed="rId5"/>
                 </a:ext>
               </a:extLst>
             </a:blip>
@@ -7664,7 +7664,7 @@
             <a:blip r:embed="rId7">
               <a:extLst>
                 <a:ext uri="{96DAC541-7B7A-43D3-8B79-37D633B846F1}">
-                  <asvg:svgBlip xmlns="" xmlns:asvg="http://schemas.microsoft.com/office/drawing/2016/SVG/main" r:embed="rId8"/>
+                  <asvg:svgBlip xmlns:asvg="http://schemas.microsoft.com/office/drawing/2016/SVG/main" xmlns="" r:embed="rId8"/>
                 </a:ext>
               </a:extLst>
             </a:blip>
@@ -7716,7 +7716,7 @@
             <a:blip r:embed="rId7">
               <a:extLst>
                 <a:ext uri="{96DAC541-7B7A-43D3-8B79-37D633B846F1}">
-                  <asvg:svgBlip xmlns="" xmlns:asvg="http://schemas.microsoft.com/office/drawing/2016/SVG/main" r:embed="rId8"/>
+                  <asvg:svgBlip xmlns:asvg="http://schemas.microsoft.com/office/drawing/2016/SVG/main" xmlns="" r:embed="rId8"/>
                 </a:ext>
               </a:extLst>
             </a:blip>
@@ -7768,7 +7768,7 @@
             <a:blip r:embed="rId9">
               <a:extLst>
                 <a:ext uri="{96DAC541-7B7A-43D3-8B79-37D633B846F1}">
-                  <asvg:svgBlip xmlns="" xmlns:asvg="http://schemas.microsoft.com/office/drawing/2016/SVG/main" r:embed="rId10"/>
+                  <asvg:svgBlip xmlns:asvg="http://schemas.microsoft.com/office/drawing/2016/SVG/main" xmlns="" r:embed="rId10"/>
                 </a:ext>
               </a:extLst>
             </a:blip>
@@ -7820,7 +7820,7 @@
             <a:blip r:embed="rId9">
               <a:extLst>
                 <a:ext uri="{96DAC541-7B7A-43D3-8B79-37D633B846F1}">
-                  <asvg:svgBlip xmlns="" xmlns:asvg="http://schemas.microsoft.com/office/drawing/2016/SVG/main" r:embed="rId10"/>
+                  <asvg:svgBlip xmlns:asvg="http://schemas.microsoft.com/office/drawing/2016/SVG/main" xmlns="" r:embed="rId10"/>
                 </a:ext>
               </a:extLst>
             </a:blip>
@@ -7913,7 +7913,7 @@
             <a:blip r:embed="rId9">
               <a:extLst>
                 <a:ext uri="{96DAC541-7B7A-43D3-8B79-37D633B846F1}">
-                  <asvg:svgBlip xmlns="" xmlns:asvg="http://schemas.microsoft.com/office/drawing/2016/SVG/main" r:embed="rId10"/>
+                  <asvg:svgBlip xmlns:asvg="http://schemas.microsoft.com/office/drawing/2016/SVG/main" xmlns="" r:embed="rId10"/>
                 </a:ext>
               </a:extLst>
             </a:blip>
@@ -7965,7 +7965,7 @@
             <a:blip r:embed="rId9">
               <a:extLst>
                 <a:ext uri="{96DAC541-7B7A-43D3-8B79-37D633B846F1}">
-                  <asvg:svgBlip xmlns="" xmlns:asvg="http://schemas.microsoft.com/office/drawing/2016/SVG/main" r:embed="rId10"/>
+                  <asvg:svgBlip xmlns:asvg="http://schemas.microsoft.com/office/drawing/2016/SVG/main" xmlns="" r:embed="rId10"/>
                 </a:ext>
               </a:extLst>
             </a:blip>
@@ -8017,7 +8017,7 @@
             <a:blip r:embed="rId9">
               <a:extLst>
                 <a:ext uri="{96DAC541-7B7A-43D3-8B79-37D633B846F1}">
-                  <asvg:svgBlip xmlns="" xmlns:asvg="http://schemas.microsoft.com/office/drawing/2016/SVG/main" r:embed="rId10"/>
+                  <asvg:svgBlip xmlns:asvg="http://schemas.microsoft.com/office/drawing/2016/SVG/main" xmlns="" r:embed="rId10"/>
                 </a:ext>
               </a:extLst>
             </a:blip>
@@ -8314,7 +8314,7 @@
             <a:blip r:embed="rId2">
               <a:extLst>
                 <a:ext uri="{96DAC541-7B7A-43D3-8B79-37D633B846F1}">
-                  <asvg:svgBlip xmlns="" xmlns:asvg="http://schemas.microsoft.com/office/drawing/2016/SVG/main" r:embed="rId3"/>
+                  <asvg:svgBlip xmlns:asvg="http://schemas.microsoft.com/office/drawing/2016/SVG/main" xmlns="" r:embed="rId3"/>
                 </a:ext>
               </a:extLst>
             </a:blip>
@@ -8407,7 +8407,7 @@
             <a:blip r:embed="rId2">
               <a:extLst>
                 <a:ext uri="{96DAC541-7B7A-43D3-8B79-37D633B846F1}">
-                  <asvg:svgBlip xmlns="" xmlns:asvg="http://schemas.microsoft.com/office/drawing/2016/SVG/main" r:embed="rId3"/>
+                  <asvg:svgBlip xmlns:asvg="http://schemas.microsoft.com/office/drawing/2016/SVG/main" xmlns="" r:embed="rId3"/>
                 </a:ext>
               </a:extLst>
             </a:blip>
@@ -8459,7 +8459,7 @@
             <a:blip r:embed="rId2">
               <a:extLst>
                 <a:ext uri="{96DAC541-7B7A-43D3-8B79-37D633B846F1}">
-                  <asvg:svgBlip xmlns="" xmlns:asvg="http://schemas.microsoft.com/office/drawing/2016/SVG/main" r:embed="rId3"/>
+                  <asvg:svgBlip xmlns:asvg="http://schemas.microsoft.com/office/drawing/2016/SVG/main" xmlns="" r:embed="rId3"/>
                 </a:ext>
               </a:extLst>
             </a:blip>
@@ -8511,7 +8511,7 @@
             <a:blip r:embed="rId2">
               <a:extLst>
                 <a:ext uri="{96DAC541-7B7A-43D3-8B79-37D633B846F1}">
-                  <asvg:svgBlip xmlns="" xmlns:asvg="http://schemas.microsoft.com/office/drawing/2016/SVG/main" r:embed="rId3"/>
+                  <asvg:svgBlip xmlns:asvg="http://schemas.microsoft.com/office/drawing/2016/SVG/main" xmlns="" r:embed="rId3"/>
                 </a:ext>
               </a:extLst>
             </a:blip>
@@ -9415,7 +9415,7 @@
             <a:blip r:embed="rId2">
               <a:extLst>
                 <a:ext uri="{96DAC541-7B7A-43D3-8B79-37D633B846F1}">
-                  <asvg:svgBlip xmlns="" xmlns:asvg="http://schemas.microsoft.com/office/drawing/2016/SVG/main" r:embed="rId3"/>
+                  <asvg:svgBlip xmlns:asvg="http://schemas.microsoft.com/office/drawing/2016/SVG/main" xmlns="" r:embed="rId3"/>
                 </a:ext>
               </a:extLst>
             </a:blip>
@@ -9467,7 +9467,7 @@
             <a:blip r:embed="rId4">
               <a:extLst>
                 <a:ext uri="{96DAC541-7B7A-43D3-8B79-37D633B846F1}">
-                  <asvg:svgBlip xmlns="" xmlns:asvg="http://schemas.microsoft.com/office/drawing/2016/SVG/main" r:embed="rId5"/>
+                  <asvg:svgBlip xmlns:asvg="http://schemas.microsoft.com/office/drawing/2016/SVG/main" xmlns="" r:embed="rId5"/>
                 </a:ext>
               </a:extLst>
             </a:blip>
@@ -9600,7 +9600,7 @@
             <a:blip r:embed="rId7">
               <a:extLst>
                 <a:ext uri="{96DAC541-7B7A-43D3-8B79-37D633B846F1}">
-                  <asvg:svgBlip xmlns="" xmlns:asvg="http://schemas.microsoft.com/office/drawing/2016/SVG/main" r:embed="rId8"/>
+                  <asvg:svgBlip xmlns:asvg="http://schemas.microsoft.com/office/drawing/2016/SVG/main" xmlns="" r:embed="rId8"/>
                 </a:ext>
               </a:extLst>
             </a:blip>
@@ -10111,7 +10111,7 @@
             <a:blip r:embed="rId2">
               <a:extLst>
                 <a:ext uri="{96DAC541-7B7A-43D3-8B79-37D633B846F1}">
-                  <asvg:svgBlip xmlns="" xmlns:asvg="http://schemas.microsoft.com/office/drawing/2016/SVG/main" r:embed="rId3"/>
+                  <asvg:svgBlip xmlns:asvg="http://schemas.microsoft.com/office/drawing/2016/SVG/main" xmlns="" r:embed="rId3"/>
                 </a:ext>
               </a:extLst>
             </a:blip>
@@ -10163,7 +10163,7 @@
             <a:blip r:embed="rId4">
               <a:extLst>
                 <a:ext uri="{96DAC541-7B7A-43D3-8B79-37D633B846F1}">
-                  <asvg:svgBlip xmlns="" xmlns:asvg="http://schemas.microsoft.com/office/drawing/2016/SVG/main" r:embed="rId5"/>
+                  <asvg:svgBlip xmlns:asvg="http://schemas.microsoft.com/office/drawing/2016/SVG/main" xmlns="" r:embed="rId5"/>
                 </a:ext>
               </a:extLst>
             </a:blip>
@@ -11144,7 +11144,7 @@
               <a:blip r:embed="rId2">
                 <a:extLst>
                   <a:ext uri="{96DAC541-7B7A-43D3-8B79-37D633B846F1}">
-                    <asvg:svgBlip xmlns="" xmlns:asvg="http://schemas.microsoft.com/office/drawing/2016/SVG/main" r:embed="rId3"/>
+                    <asvg:svgBlip xmlns:asvg="http://schemas.microsoft.com/office/drawing/2016/SVG/main" xmlns="" r:embed="rId3"/>
                   </a:ext>
                 </a:extLst>
               </a:blip>
@@ -11197,7 +11197,7 @@
             <a:blip r:embed="rId4">
               <a:extLst>
                 <a:ext uri="{96DAC541-7B7A-43D3-8B79-37D633B846F1}">
-                  <asvg:svgBlip xmlns="" xmlns:asvg="http://schemas.microsoft.com/office/drawing/2016/SVG/main" r:embed="rId5"/>
+                  <asvg:svgBlip xmlns:asvg="http://schemas.microsoft.com/office/drawing/2016/SVG/main" xmlns="" r:embed="rId5"/>
                 </a:ext>
               </a:extLst>
             </a:blip>
@@ -12919,7 +12919,7 @@
             <a:blip r:embed="rId6">
               <a:extLst>
                 <a:ext uri="{96DAC541-7B7A-43D3-8B79-37D633B846F1}">
-                  <asvg:svgBlip xmlns="" xmlns:asvg="http://schemas.microsoft.com/office/drawing/2016/SVG/main" r:embed="rId7"/>
+                  <asvg:svgBlip xmlns:asvg="http://schemas.microsoft.com/office/drawing/2016/SVG/main" xmlns="" r:embed="rId7"/>
                 </a:ext>
               </a:extLst>
             </a:blip>
@@ -13493,7 +13493,7 @@
               <a:blip r:embed="rId2">
                 <a:extLst>
                   <a:ext uri="{96DAC541-7B7A-43D3-8B79-37D633B846F1}">
-                    <asvg:svgBlip xmlns="" xmlns:asvg="http://schemas.microsoft.com/office/drawing/2016/SVG/main" r:embed="rId5"/>
+                    <asvg:svgBlip xmlns:asvg="http://schemas.microsoft.com/office/drawing/2016/SVG/main" xmlns="" r:embed="rId5"/>
                   </a:ext>
                 </a:extLst>
               </a:blip>
@@ -13736,7 +13736,31 @@
                 <a:cs typeface="Atkinson Hyperlegible"/>
                 <a:sym typeface="Atkinson Hyperlegible"/>
               </a:rPr>
-              <a:t>=&gt; Muhammad BSSE25002</a:t>
+              <a:t>=&gt; </a:t>
+            </a:r>
+            <a:r>
+              <a:rPr lang="en-GB" sz="2400" b="1" dirty="0" err="1" smtClean="0">
+                <a:solidFill>
+                  <a:srgbClr val="76CEE4"/>
+                </a:solidFill>
+                <a:latin typeface="Atkinson Hyperlegible"/>
+                <a:ea typeface="Atkinson Hyperlegible"/>
+                <a:cs typeface="Atkinson Hyperlegible"/>
+                <a:sym typeface="Atkinson Hyperlegible"/>
+              </a:rPr>
+              <a:t>Minahil</a:t>
+            </a:r>
+            <a:r>
+              <a:rPr lang="en-GB" sz="2400" b="1" dirty="0" smtClean="0">
+                <a:solidFill>
+                  <a:srgbClr val="76CEE4"/>
+                </a:solidFill>
+                <a:latin typeface="Atkinson Hyperlegible"/>
+                <a:ea typeface="Atkinson Hyperlegible"/>
+                <a:cs typeface="Atkinson Hyperlegible"/>
+                <a:sym typeface="Atkinson Hyperlegible"/>
+              </a:rPr>
+              <a:t> BSSE25045</a:t>
             </a:r>
             <a:endParaRPr lang="en-US" sz="2000" b="1" dirty="0">
               <a:solidFill>
@@ -13898,7 +13922,7 @@
               </a:spcBef>
             </a:pPr>
             <a:r>
-              <a:rPr lang="en-GB" sz="2400" b="1" dirty="0" smtClean="0">
+              <a:rPr lang="en-GB" sz="2200" b="1" dirty="0" smtClean="0">
                 <a:solidFill>
                   <a:srgbClr val="76CEE4"/>
                 </a:solidFill>
@@ -13910,7 +13934,7 @@
               <a:t>=&gt; </a:t>
             </a:r>
             <a:r>
-              <a:rPr lang="en-GB" sz="2400" b="1" dirty="0" err="1" smtClean="0">
+              <a:rPr lang="en-GB" sz="2200" b="1" dirty="0" smtClean="0">
                 <a:solidFill>
                   <a:srgbClr val="76CEE4"/>
                 </a:solidFill>
@@ -13919,21 +13943,9 @@
                 <a:cs typeface="Atkinson Hyperlegible"/>
                 <a:sym typeface="Atkinson Hyperlegible"/>
               </a:rPr>
-              <a:t>Minahil</a:t>
-            </a:r>
-            <a:r>
-              <a:rPr lang="en-GB" sz="2400" b="1" dirty="0" smtClean="0">
-                <a:solidFill>
-                  <a:srgbClr val="76CEE4"/>
-                </a:solidFill>
-                <a:latin typeface="Atkinson Hyperlegible"/>
-                <a:ea typeface="Atkinson Hyperlegible"/>
-                <a:cs typeface="Atkinson Hyperlegible"/>
-                <a:sym typeface="Atkinson Hyperlegible"/>
-              </a:rPr>
-              <a:t> BSSE25045</a:t>
-            </a:r>
-            <a:endParaRPr lang="en-US" sz="2400" b="1" dirty="0">
+              <a:t>Muhammad BSSE25002</a:t>
+            </a:r>
+            <a:endParaRPr lang="en-US" sz="2200" b="1" dirty="0">
               <a:solidFill>
                 <a:srgbClr val="76CEE4"/>
               </a:solidFill>
@@ -14280,15 +14292,6 @@
               </a:rPr>
               <a:t> BSSE25038</a:t>
             </a:r>
-            <a:endParaRPr lang="en-GB" sz="2400" b="1" dirty="0" smtClean="0">
-              <a:solidFill>
-                <a:srgbClr val="76CEE4"/>
-              </a:solidFill>
-              <a:latin typeface="Atkinson Hyperlegible"/>
-              <a:ea typeface="Atkinson Hyperlegible"/>
-              <a:cs typeface="Atkinson Hyperlegible"/>
-              <a:sym typeface="Atkinson Hyperlegible"/>
-            </a:endParaRPr>
           </a:p>
         </p:txBody>
       </p:sp>
@@ -14425,7 +14428,7 @@
                   </a14:imgProps>
                 </a:ext>
                 <a:ext uri="{96DAC541-7B7A-43D3-8B79-37D633B846F1}">
-                  <asvg:svgBlip xmlns="" xmlns:asvg="http://schemas.microsoft.com/office/drawing/2016/SVG/main" r:embed="rId3"/>
+                  <asvg:svgBlip xmlns:asvg="http://schemas.microsoft.com/office/drawing/2016/SVG/main" xmlns="" r:embed="rId3"/>
                 </a:ext>
               </a:extLst>
             </a:blip>
@@ -14494,7 +14497,7 @@
                   </a14:imgProps>
                 </a:ext>
                 <a:ext uri="{96DAC541-7B7A-43D3-8B79-37D633B846F1}">
-                  <asvg:svgBlip xmlns="" xmlns:asvg="http://schemas.microsoft.com/office/drawing/2016/SVG/main" r:embed="rId3"/>
+                  <asvg:svgBlip xmlns:asvg="http://schemas.microsoft.com/office/drawing/2016/SVG/main" xmlns="" r:embed="rId3"/>
                 </a:ext>
               </a:extLst>
             </a:blip>
@@ -14562,7 +14565,7 @@
                   </a14:imgProps>
                 </a:ext>
                 <a:ext uri="{96DAC541-7B7A-43D3-8B79-37D633B846F1}">
-                  <asvg:svgBlip xmlns="" xmlns:asvg="http://schemas.microsoft.com/office/drawing/2016/SVG/main" r:embed="rId3"/>
+                  <asvg:svgBlip xmlns:asvg="http://schemas.microsoft.com/office/drawing/2016/SVG/main" xmlns="" r:embed="rId3"/>
                 </a:ext>
               </a:extLst>
             </a:blip>

--- a/Pseudo E-Challan System.pptx
+++ b/Pseudo E-Challan System.pptx
@@ -21,11 +21,11 @@
   <p:notesSz cx="6858000" cy="9144000"/>
   <p:embeddedFontLst>
     <p:embeddedFont>
-      <p:font typeface="Atkinson Hyperlegible" panose="020B0604020202020204" charset="0"/>
+      <p:font typeface="Atkinson Hyperlegible Bold" panose="020B0604020202020204" charset="0"/>
       <p:regular r:id="rId13"/>
     </p:embeddedFont>
     <p:embeddedFont>
-      <p:font typeface="Atkinson Hyperlegible Bold" panose="020B0604020202020204" charset="0"/>
+      <p:font typeface="Atkinson Hyperlegible" panose="020B0604020202020204" charset="0"/>
       <p:regular r:id="rId14"/>
     </p:embeddedFont>
     <p:embeddedFont>
@@ -332,7 +332,7 @@
             <a:fld id="{1D8BD707-D9CF-40AE-B4C6-C98DA3205C09}" type="datetimeFigureOut">
               <a:rPr lang="en-US" smtClean="0"/>
               <a:pPr/>
-              <a:t>11/30/2025</a:t>
+              <a:t>12/6/2025</a:t>
             </a:fld>
             <a:endParaRPr lang="en-US"/>
           </a:p>
@@ -499,7 +499,7 @@
             <a:fld id="{1D8BD707-D9CF-40AE-B4C6-C98DA3205C09}" type="datetimeFigureOut">
               <a:rPr lang="en-US" smtClean="0"/>
               <a:pPr/>
-              <a:t>11/30/2025</a:t>
+              <a:t>12/6/2025</a:t>
             </a:fld>
             <a:endParaRPr lang="en-US"/>
           </a:p>
@@ -676,7 +676,7 @@
             <a:fld id="{1D8BD707-D9CF-40AE-B4C6-C98DA3205C09}" type="datetimeFigureOut">
               <a:rPr lang="en-US" smtClean="0"/>
               <a:pPr/>
-              <a:t>11/30/2025</a:t>
+              <a:t>12/6/2025</a:t>
             </a:fld>
             <a:endParaRPr lang="en-US"/>
           </a:p>
@@ -843,7 +843,7 @@
             <a:fld id="{1D8BD707-D9CF-40AE-B4C6-C98DA3205C09}" type="datetimeFigureOut">
               <a:rPr lang="en-US" smtClean="0"/>
               <a:pPr/>
-              <a:t>11/30/2025</a:t>
+              <a:t>12/6/2025</a:t>
             </a:fld>
             <a:endParaRPr lang="en-US"/>
           </a:p>
@@ -1086,7 +1086,7 @@
             <a:fld id="{1D8BD707-D9CF-40AE-B4C6-C98DA3205C09}" type="datetimeFigureOut">
               <a:rPr lang="en-US" smtClean="0"/>
               <a:pPr/>
-              <a:t>11/30/2025</a:t>
+              <a:t>12/6/2025</a:t>
             </a:fld>
             <a:endParaRPr lang="en-US"/>
           </a:p>
@@ -1371,7 +1371,7 @@
             <a:fld id="{1D8BD707-D9CF-40AE-B4C6-C98DA3205C09}" type="datetimeFigureOut">
               <a:rPr lang="en-US" smtClean="0"/>
               <a:pPr/>
-              <a:t>11/30/2025</a:t>
+              <a:t>12/6/2025</a:t>
             </a:fld>
             <a:endParaRPr lang="en-US"/>
           </a:p>
@@ -1790,7 +1790,7 @@
             <a:fld id="{1D8BD707-D9CF-40AE-B4C6-C98DA3205C09}" type="datetimeFigureOut">
               <a:rPr lang="en-US" smtClean="0"/>
               <a:pPr/>
-              <a:t>11/30/2025</a:t>
+              <a:t>12/6/2025</a:t>
             </a:fld>
             <a:endParaRPr lang="en-US"/>
           </a:p>
@@ -1905,7 +1905,7 @@
             <a:fld id="{1D8BD707-D9CF-40AE-B4C6-C98DA3205C09}" type="datetimeFigureOut">
               <a:rPr lang="en-US" smtClean="0"/>
               <a:pPr/>
-              <a:t>11/30/2025</a:t>
+              <a:t>12/6/2025</a:t>
             </a:fld>
             <a:endParaRPr lang="en-US"/>
           </a:p>
@@ -1997,7 +1997,7 @@
             <a:fld id="{1D8BD707-D9CF-40AE-B4C6-C98DA3205C09}" type="datetimeFigureOut">
               <a:rPr lang="en-US" smtClean="0"/>
               <a:pPr/>
-              <a:t>11/30/2025</a:t>
+              <a:t>12/6/2025</a:t>
             </a:fld>
             <a:endParaRPr lang="en-US"/>
           </a:p>
@@ -2271,7 +2271,7 @@
             <a:fld id="{1D8BD707-D9CF-40AE-B4C6-C98DA3205C09}" type="datetimeFigureOut">
               <a:rPr lang="en-US" smtClean="0"/>
               <a:pPr/>
-              <a:t>11/30/2025</a:t>
+              <a:t>12/6/2025</a:t>
             </a:fld>
             <a:endParaRPr lang="en-US"/>
           </a:p>
@@ -2521,7 +2521,7 @@
             <a:fld id="{1D8BD707-D9CF-40AE-B4C6-C98DA3205C09}" type="datetimeFigureOut">
               <a:rPr lang="en-US" smtClean="0"/>
               <a:pPr/>
-              <a:t>11/30/2025</a:t>
+              <a:t>12/6/2025</a:t>
             </a:fld>
             <a:endParaRPr lang="en-US"/>
           </a:p>
@@ -2731,7 +2731,7 @@
             <a:fld id="{1D8BD707-D9CF-40AE-B4C6-C98DA3205C09}" type="datetimeFigureOut">
               <a:rPr lang="en-US" smtClean="0"/>
               <a:pPr/>
-              <a:t>11/30/2025</a:t>
+              <a:t>12/6/2025</a:t>
             </a:fld>
             <a:endParaRPr lang="en-US"/>
           </a:p>
@@ -3245,7 +3245,7 @@
             <a:blip r:embed="rId3">
               <a:extLst>
                 <a:ext uri="{96DAC541-7B7A-43D3-8B79-37D633B846F1}">
-                  <asvg:svgBlip xmlns:asvg="http://schemas.microsoft.com/office/drawing/2016/SVG/main" xmlns="" r:embed="rId4"/>
+                  <asvg:svgBlip xmlns="" xmlns:asvg="http://schemas.microsoft.com/office/drawing/2016/SVG/main" r:embed="rId4"/>
                 </a:ext>
               </a:extLst>
             </a:blip>
@@ -3297,7 +3297,7 @@
             <a:blip r:embed="rId5">
               <a:extLst>
                 <a:ext uri="{96DAC541-7B7A-43D3-8B79-37D633B846F1}">
-                  <asvg:svgBlip xmlns:asvg="http://schemas.microsoft.com/office/drawing/2016/SVG/main" xmlns="" r:embed="rId6"/>
+                  <asvg:svgBlip xmlns="" xmlns:asvg="http://schemas.microsoft.com/office/drawing/2016/SVG/main" r:embed="rId6"/>
                 </a:ext>
               </a:extLst>
             </a:blip>
@@ -3349,7 +3349,7 @@
             <a:blip r:embed="rId7">
               <a:extLst>
                 <a:ext uri="{96DAC541-7B7A-43D3-8B79-37D633B846F1}">
-                  <asvg:svgBlip xmlns:asvg="http://schemas.microsoft.com/office/drawing/2016/SVG/main" xmlns="" r:embed="rId8"/>
+                  <asvg:svgBlip xmlns="" xmlns:asvg="http://schemas.microsoft.com/office/drawing/2016/SVG/main" r:embed="rId8"/>
                 </a:ext>
               </a:extLst>
             </a:blip>
@@ -3415,7 +3415,7 @@
               <a:blip r:embed="rId9">
                 <a:extLst>
                   <a:ext uri="{96DAC541-7B7A-43D3-8B79-37D633B846F1}">
-                    <asvg:svgBlip xmlns:asvg="http://schemas.microsoft.com/office/drawing/2016/SVG/main" xmlns="" r:embed="rId10"/>
+                    <asvg:svgBlip xmlns="" xmlns:asvg="http://schemas.microsoft.com/office/drawing/2016/SVG/main" r:embed="rId10"/>
                   </a:ext>
                 </a:extLst>
               </a:blip>
@@ -3919,7 +3919,7 @@
             <a:blip r:embed="rId2">
               <a:extLst>
                 <a:ext uri="{96DAC541-7B7A-43D3-8B79-37D633B846F1}">
-                  <asvg:svgBlip xmlns:asvg="http://schemas.microsoft.com/office/drawing/2016/SVG/main" xmlns="" r:embed="rId3"/>
+                  <asvg:svgBlip xmlns="" xmlns:asvg="http://schemas.microsoft.com/office/drawing/2016/SVG/main" r:embed="rId3"/>
                 </a:ext>
               </a:extLst>
             </a:blip>
@@ -4117,7 +4117,7 @@
               <a:blip r:embed="rId4">
                 <a:extLst>
                   <a:ext uri="{96DAC541-7B7A-43D3-8B79-37D633B846F1}">
-                    <asvg:svgBlip xmlns:asvg="http://schemas.microsoft.com/office/drawing/2016/SVG/main" xmlns="" r:embed="rId5"/>
+                    <asvg:svgBlip xmlns="" xmlns:asvg="http://schemas.microsoft.com/office/drawing/2016/SVG/main" r:embed="rId5"/>
                   </a:ext>
                 </a:extLst>
               </a:blip>
@@ -4170,7 +4170,7 @@
             <a:blip r:embed="rId2">
               <a:extLst>
                 <a:ext uri="{96DAC541-7B7A-43D3-8B79-37D633B846F1}">
-                  <asvg:svgBlip xmlns:asvg="http://schemas.microsoft.com/office/drawing/2016/SVG/main" xmlns="" r:embed="rId3"/>
+                  <asvg:svgBlip xmlns="" xmlns:asvg="http://schemas.microsoft.com/office/drawing/2016/SVG/main" r:embed="rId3"/>
                 </a:ext>
               </a:extLst>
             </a:blip>
@@ -4222,7 +4222,7 @@
             <a:blip r:embed="rId2">
               <a:extLst>
                 <a:ext uri="{96DAC541-7B7A-43D3-8B79-37D633B846F1}">
-                  <asvg:svgBlip xmlns:asvg="http://schemas.microsoft.com/office/drawing/2016/SVG/main" xmlns="" r:embed="rId3"/>
+                  <asvg:svgBlip xmlns="" xmlns:asvg="http://schemas.microsoft.com/office/drawing/2016/SVG/main" r:embed="rId3"/>
                 </a:ext>
               </a:extLst>
             </a:blip>
@@ -5044,7 +5044,7 @@
             <a:blip r:embed="rId2">
               <a:extLst>
                 <a:ext uri="{96DAC541-7B7A-43D3-8B79-37D633B846F1}">
-                  <asvg:svgBlip xmlns:asvg="http://schemas.microsoft.com/office/drawing/2016/SVG/main" xmlns="" r:embed="rId3"/>
+                  <asvg:svgBlip xmlns="" xmlns:asvg="http://schemas.microsoft.com/office/drawing/2016/SVG/main" r:embed="rId3"/>
                 </a:ext>
               </a:extLst>
             </a:blip>
@@ -5242,7 +5242,7 @@
               <a:blip r:embed="rId4">
                 <a:extLst>
                   <a:ext uri="{96DAC541-7B7A-43D3-8B79-37D633B846F1}">
-                    <asvg:svgBlip xmlns:asvg="http://schemas.microsoft.com/office/drawing/2016/SVG/main" xmlns="" r:embed="rId5"/>
+                    <asvg:svgBlip xmlns="" xmlns:asvg="http://schemas.microsoft.com/office/drawing/2016/SVG/main" r:embed="rId5"/>
                   </a:ext>
                 </a:extLst>
               </a:blip>
@@ -5295,7 +5295,7 @@
             <a:blip r:embed="rId2">
               <a:extLst>
                 <a:ext uri="{96DAC541-7B7A-43D3-8B79-37D633B846F1}">
-                  <asvg:svgBlip xmlns:asvg="http://schemas.microsoft.com/office/drawing/2016/SVG/main" xmlns="" r:embed="rId3"/>
+                  <asvg:svgBlip xmlns="" xmlns:asvg="http://schemas.microsoft.com/office/drawing/2016/SVG/main" r:embed="rId3"/>
                 </a:ext>
               </a:extLst>
             </a:blip>
@@ -5347,7 +5347,7 @@
             <a:blip r:embed="rId2">
               <a:extLst>
                 <a:ext uri="{96DAC541-7B7A-43D3-8B79-37D633B846F1}">
-                  <asvg:svgBlip xmlns:asvg="http://schemas.microsoft.com/office/drawing/2016/SVG/main" xmlns="" r:embed="rId3"/>
+                  <asvg:svgBlip xmlns="" xmlns:asvg="http://schemas.microsoft.com/office/drawing/2016/SVG/main" r:embed="rId3"/>
                 </a:ext>
               </a:extLst>
             </a:blip>
@@ -6406,7 +6406,7 @@
             <a:blip r:embed="rId4">
               <a:extLst>
                 <a:ext uri="{96DAC541-7B7A-43D3-8B79-37D633B846F1}">
-                  <asvg:svgBlip xmlns:asvg="http://schemas.microsoft.com/office/drawing/2016/SVG/main" xmlns="" r:embed="rId5"/>
+                  <asvg:svgBlip xmlns="" xmlns:asvg="http://schemas.microsoft.com/office/drawing/2016/SVG/main" r:embed="rId5"/>
                 </a:ext>
               </a:extLst>
             </a:blip>
@@ -6871,7 +6871,7 @@
             <a:blip r:embed="rId2">
               <a:extLst>
                 <a:ext uri="{96DAC541-7B7A-43D3-8B79-37D633B846F1}">
-                  <asvg:svgBlip xmlns:asvg="http://schemas.microsoft.com/office/drawing/2016/SVG/main" xmlns="" r:embed="rId3"/>
+                  <asvg:svgBlip xmlns="" xmlns:asvg="http://schemas.microsoft.com/office/drawing/2016/SVG/main" r:embed="rId3"/>
                 </a:ext>
               </a:extLst>
             </a:blip>
@@ -6926,7 +6926,7 @@
             <a:blip r:embed="rId2">
               <a:extLst>
                 <a:ext uri="{96DAC541-7B7A-43D3-8B79-37D633B846F1}">
-                  <asvg:svgBlip xmlns:asvg="http://schemas.microsoft.com/office/drawing/2016/SVG/main" xmlns="" r:embed="rId3"/>
+                  <asvg:svgBlip xmlns="" xmlns:asvg="http://schemas.microsoft.com/office/drawing/2016/SVG/main" r:embed="rId3"/>
                 </a:ext>
               </a:extLst>
             </a:blip>
@@ -6981,7 +6981,7 @@
             <a:blip r:embed="rId2">
               <a:extLst>
                 <a:ext uri="{96DAC541-7B7A-43D3-8B79-37D633B846F1}">
-                  <asvg:svgBlip xmlns:asvg="http://schemas.microsoft.com/office/drawing/2016/SVG/main" xmlns="" r:embed="rId3"/>
+                  <asvg:svgBlip xmlns="" xmlns:asvg="http://schemas.microsoft.com/office/drawing/2016/SVG/main" r:embed="rId3"/>
                 </a:ext>
               </a:extLst>
             </a:blip>
@@ -7082,7 +7082,7 @@
             <a:blip r:embed="rId5">
               <a:extLst>
                 <a:ext uri="{96DAC541-7B7A-43D3-8B79-37D633B846F1}">
-                  <asvg:svgBlip xmlns:asvg="http://schemas.microsoft.com/office/drawing/2016/SVG/main" xmlns="" r:embed="rId6"/>
+                  <asvg:svgBlip xmlns="" xmlns:asvg="http://schemas.microsoft.com/office/drawing/2016/SVG/main" r:embed="rId6"/>
                 </a:ext>
               </a:extLst>
             </a:blip>
@@ -7134,7 +7134,7 @@
             <a:blip r:embed="rId5">
               <a:extLst>
                 <a:ext uri="{96DAC541-7B7A-43D3-8B79-37D633B846F1}">
-                  <asvg:svgBlip xmlns:asvg="http://schemas.microsoft.com/office/drawing/2016/SVG/main" xmlns="" r:embed="rId6"/>
+                  <asvg:svgBlip xmlns="" xmlns:asvg="http://schemas.microsoft.com/office/drawing/2016/SVG/main" r:embed="rId6"/>
                 </a:ext>
               </a:extLst>
             </a:blip>
@@ -7431,7 +7431,7 @@
             <a:blip r:embed="rId2">
               <a:extLst>
                 <a:ext uri="{96DAC541-7B7A-43D3-8B79-37D633B846F1}">
-                  <asvg:svgBlip xmlns:asvg="http://schemas.microsoft.com/office/drawing/2016/SVG/main" xmlns="" r:embed="rId3"/>
+                  <asvg:svgBlip xmlns="" xmlns:asvg="http://schemas.microsoft.com/office/drawing/2016/SVG/main" r:embed="rId3"/>
                 </a:ext>
               </a:extLst>
             </a:blip>
@@ -7483,7 +7483,7 @@
             <a:blip r:embed="rId4">
               <a:extLst>
                 <a:ext uri="{96DAC541-7B7A-43D3-8B79-37D633B846F1}">
-                  <asvg:svgBlip xmlns:asvg="http://schemas.microsoft.com/office/drawing/2016/SVG/main" xmlns="" r:embed="rId5"/>
+                  <asvg:svgBlip xmlns="" xmlns:asvg="http://schemas.microsoft.com/office/drawing/2016/SVG/main" r:embed="rId5"/>
                 </a:ext>
               </a:extLst>
             </a:blip>
@@ -7664,7 +7664,7 @@
             <a:blip r:embed="rId7">
               <a:extLst>
                 <a:ext uri="{96DAC541-7B7A-43D3-8B79-37D633B846F1}">
-                  <asvg:svgBlip xmlns:asvg="http://schemas.microsoft.com/office/drawing/2016/SVG/main" xmlns="" r:embed="rId8"/>
+                  <asvg:svgBlip xmlns="" xmlns:asvg="http://schemas.microsoft.com/office/drawing/2016/SVG/main" r:embed="rId8"/>
                 </a:ext>
               </a:extLst>
             </a:blip>
@@ -7716,7 +7716,7 @@
             <a:blip r:embed="rId7">
               <a:extLst>
                 <a:ext uri="{96DAC541-7B7A-43D3-8B79-37D633B846F1}">
-                  <asvg:svgBlip xmlns:asvg="http://schemas.microsoft.com/office/drawing/2016/SVG/main" xmlns="" r:embed="rId8"/>
+                  <asvg:svgBlip xmlns="" xmlns:asvg="http://schemas.microsoft.com/office/drawing/2016/SVG/main" r:embed="rId8"/>
                 </a:ext>
               </a:extLst>
             </a:blip>
@@ -7768,7 +7768,7 @@
             <a:blip r:embed="rId9">
               <a:extLst>
                 <a:ext uri="{96DAC541-7B7A-43D3-8B79-37D633B846F1}">
-                  <asvg:svgBlip xmlns:asvg="http://schemas.microsoft.com/office/drawing/2016/SVG/main" xmlns="" r:embed="rId10"/>
+                  <asvg:svgBlip xmlns="" xmlns:asvg="http://schemas.microsoft.com/office/drawing/2016/SVG/main" r:embed="rId10"/>
                 </a:ext>
               </a:extLst>
             </a:blip>
@@ -7820,7 +7820,7 @@
             <a:blip r:embed="rId9">
               <a:extLst>
                 <a:ext uri="{96DAC541-7B7A-43D3-8B79-37D633B846F1}">
-                  <asvg:svgBlip xmlns:asvg="http://schemas.microsoft.com/office/drawing/2016/SVG/main" xmlns="" r:embed="rId10"/>
+                  <asvg:svgBlip xmlns="" xmlns:asvg="http://schemas.microsoft.com/office/drawing/2016/SVG/main" r:embed="rId10"/>
                 </a:ext>
               </a:extLst>
             </a:blip>
@@ -7913,7 +7913,7 @@
             <a:blip r:embed="rId9">
               <a:extLst>
                 <a:ext uri="{96DAC541-7B7A-43D3-8B79-37D633B846F1}">
-                  <asvg:svgBlip xmlns:asvg="http://schemas.microsoft.com/office/drawing/2016/SVG/main" xmlns="" r:embed="rId10"/>
+                  <asvg:svgBlip xmlns="" xmlns:asvg="http://schemas.microsoft.com/office/drawing/2016/SVG/main" r:embed="rId10"/>
                 </a:ext>
               </a:extLst>
             </a:blip>
@@ -7965,7 +7965,7 @@
             <a:blip r:embed="rId9">
               <a:extLst>
                 <a:ext uri="{96DAC541-7B7A-43D3-8B79-37D633B846F1}">
-                  <asvg:svgBlip xmlns:asvg="http://schemas.microsoft.com/office/drawing/2016/SVG/main" xmlns="" r:embed="rId10"/>
+                  <asvg:svgBlip xmlns="" xmlns:asvg="http://schemas.microsoft.com/office/drawing/2016/SVG/main" r:embed="rId10"/>
                 </a:ext>
               </a:extLst>
             </a:blip>
@@ -8017,7 +8017,7 @@
             <a:blip r:embed="rId9">
               <a:extLst>
                 <a:ext uri="{96DAC541-7B7A-43D3-8B79-37D633B846F1}">
-                  <asvg:svgBlip xmlns:asvg="http://schemas.microsoft.com/office/drawing/2016/SVG/main" xmlns="" r:embed="rId10"/>
+                  <asvg:svgBlip xmlns="" xmlns:asvg="http://schemas.microsoft.com/office/drawing/2016/SVG/main" r:embed="rId10"/>
                 </a:ext>
               </a:extLst>
             </a:blip>
@@ -8314,7 +8314,7 @@
             <a:blip r:embed="rId2">
               <a:extLst>
                 <a:ext uri="{96DAC541-7B7A-43D3-8B79-37D633B846F1}">
-                  <asvg:svgBlip xmlns:asvg="http://schemas.microsoft.com/office/drawing/2016/SVG/main" xmlns="" r:embed="rId3"/>
+                  <asvg:svgBlip xmlns="" xmlns:asvg="http://schemas.microsoft.com/office/drawing/2016/SVG/main" r:embed="rId3"/>
                 </a:ext>
               </a:extLst>
             </a:blip>
@@ -8407,7 +8407,7 @@
             <a:blip r:embed="rId2">
               <a:extLst>
                 <a:ext uri="{96DAC541-7B7A-43D3-8B79-37D633B846F1}">
-                  <asvg:svgBlip xmlns:asvg="http://schemas.microsoft.com/office/drawing/2016/SVG/main" xmlns="" r:embed="rId3"/>
+                  <asvg:svgBlip xmlns="" xmlns:asvg="http://schemas.microsoft.com/office/drawing/2016/SVG/main" r:embed="rId3"/>
                 </a:ext>
               </a:extLst>
             </a:blip>
@@ -8459,7 +8459,7 @@
             <a:blip r:embed="rId2">
               <a:extLst>
                 <a:ext uri="{96DAC541-7B7A-43D3-8B79-37D633B846F1}">
-                  <asvg:svgBlip xmlns:asvg="http://schemas.microsoft.com/office/drawing/2016/SVG/main" xmlns="" r:embed="rId3"/>
+                  <asvg:svgBlip xmlns="" xmlns:asvg="http://schemas.microsoft.com/office/drawing/2016/SVG/main" r:embed="rId3"/>
                 </a:ext>
               </a:extLst>
             </a:blip>
@@ -8511,7 +8511,7 @@
             <a:blip r:embed="rId2">
               <a:extLst>
                 <a:ext uri="{96DAC541-7B7A-43D3-8B79-37D633B846F1}">
-                  <asvg:svgBlip xmlns:asvg="http://schemas.microsoft.com/office/drawing/2016/SVG/main" xmlns="" r:embed="rId3"/>
+                  <asvg:svgBlip xmlns="" xmlns:asvg="http://schemas.microsoft.com/office/drawing/2016/SVG/main" r:embed="rId3"/>
                 </a:ext>
               </a:extLst>
             </a:blip>
@@ -9415,7 +9415,7 @@
             <a:blip r:embed="rId2">
               <a:extLst>
                 <a:ext uri="{96DAC541-7B7A-43D3-8B79-37D633B846F1}">
-                  <asvg:svgBlip xmlns:asvg="http://schemas.microsoft.com/office/drawing/2016/SVG/main" xmlns="" r:embed="rId3"/>
+                  <asvg:svgBlip xmlns="" xmlns:asvg="http://schemas.microsoft.com/office/drawing/2016/SVG/main" r:embed="rId3"/>
                 </a:ext>
               </a:extLst>
             </a:blip>
@@ -9467,7 +9467,7 @@
             <a:blip r:embed="rId4">
               <a:extLst>
                 <a:ext uri="{96DAC541-7B7A-43D3-8B79-37D633B846F1}">
-                  <asvg:svgBlip xmlns:asvg="http://schemas.microsoft.com/office/drawing/2016/SVG/main" xmlns="" r:embed="rId5"/>
+                  <asvg:svgBlip xmlns="" xmlns:asvg="http://schemas.microsoft.com/office/drawing/2016/SVG/main" r:embed="rId5"/>
                 </a:ext>
               </a:extLst>
             </a:blip>
@@ -9600,7 +9600,7 @@
             <a:blip r:embed="rId7">
               <a:extLst>
                 <a:ext uri="{96DAC541-7B7A-43D3-8B79-37D633B846F1}">
-                  <asvg:svgBlip xmlns:asvg="http://schemas.microsoft.com/office/drawing/2016/SVG/main" xmlns="" r:embed="rId8"/>
+                  <asvg:svgBlip xmlns="" xmlns:asvg="http://schemas.microsoft.com/office/drawing/2016/SVG/main" r:embed="rId8"/>
                 </a:ext>
               </a:extLst>
             </a:blip>
@@ -10111,7 +10111,7 @@
             <a:blip r:embed="rId2">
               <a:extLst>
                 <a:ext uri="{96DAC541-7B7A-43D3-8B79-37D633B846F1}">
-                  <asvg:svgBlip xmlns:asvg="http://schemas.microsoft.com/office/drawing/2016/SVG/main" xmlns="" r:embed="rId3"/>
+                  <asvg:svgBlip xmlns="" xmlns:asvg="http://schemas.microsoft.com/office/drawing/2016/SVG/main" r:embed="rId3"/>
                 </a:ext>
               </a:extLst>
             </a:blip>
@@ -10163,7 +10163,7 @@
             <a:blip r:embed="rId4">
               <a:extLst>
                 <a:ext uri="{96DAC541-7B7A-43D3-8B79-37D633B846F1}">
-                  <asvg:svgBlip xmlns:asvg="http://schemas.microsoft.com/office/drawing/2016/SVG/main" xmlns="" r:embed="rId5"/>
+                  <asvg:svgBlip xmlns="" xmlns:asvg="http://schemas.microsoft.com/office/drawing/2016/SVG/main" r:embed="rId5"/>
                 </a:ext>
               </a:extLst>
             </a:blip>
@@ -11144,7 +11144,7 @@
               <a:blip r:embed="rId2">
                 <a:extLst>
                   <a:ext uri="{96DAC541-7B7A-43D3-8B79-37D633B846F1}">
-                    <asvg:svgBlip xmlns:asvg="http://schemas.microsoft.com/office/drawing/2016/SVG/main" xmlns="" r:embed="rId3"/>
+                    <asvg:svgBlip xmlns="" xmlns:asvg="http://schemas.microsoft.com/office/drawing/2016/SVG/main" r:embed="rId3"/>
                   </a:ext>
                 </a:extLst>
               </a:blip>
@@ -11197,7 +11197,7 @@
             <a:blip r:embed="rId4">
               <a:extLst>
                 <a:ext uri="{96DAC541-7B7A-43D3-8B79-37D633B846F1}">
-                  <asvg:svgBlip xmlns:asvg="http://schemas.microsoft.com/office/drawing/2016/SVG/main" xmlns="" r:embed="rId5"/>
+                  <asvg:svgBlip xmlns="" xmlns:asvg="http://schemas.microsoft.com/office/drawing/2016/SVG/main" r:embed="rId5"/>
                 </a:ext>
               </a:extLst>
             </a:blip>
@@ -12919,7 +12919,7 @@
             <a:blip r:embed="rId6">
               <a:extLst>
                 <a:ext uri="{96DAC541-7B7A-43D3-8B79-37D633B846F1}">
-                  <asvg:svgBlip xmlns:asvg="http://schemas.microsoft.com/office/drawing/2016/SVG/main" xmlns="" r:embed="rId7"/>
+                  <asvg:svgBlip xmlns="" xmlns:asvg="http://schemas.microsoft.com/office/drawing/2016/SVG/main" r:embed="rId7"/>
                 </a:ext>
               </a:extLst>
             </a:blip>
@@ -13021,7 +13021,7 @@
         </p:nvSpPr>
         <p:spPr>
           <a:xfrm>
-            <a:off x="2133600" y="5127460"/>
+            <a:off x="1600200" y="5127460"/>
             <a:ext cx="16154400" cy="92240"/>
           </a:xfrm>
           <a:prstGeom prst="line">
@@ -13045,7 +13045,7 @@
         </p:nvGrpSpPr>
         <p:grpSpPr>
           <a:xfrm>
-            <a:off x="1928618" y="4948238"/>
+            <a:off x="1395218" y="4948238"/>
             <a:ext cx="323850" cy="323850"/>
             <a:chOff x="0" y="0"/>
             <a:chExt cx="6350000" cy="6350000"/>
@@ -13112,7 +13112,7 @@
         </p:nvGrpSpPr>
         <p:grpSpPr>
           <a:xfrm>
-            <a:off x="6515303" y="5048250"/>
+            <a:off x="4933950" y="5048250"/>
             <a:ext cx="323850" cy="323850"/>
             <a:chOff x="0" y="0"/>
             <a:chExt cx="6350000" cy="6350000"/>
@@ -13179,7 +13179,7 @@
         </p:nvGrpSpPr>
         <p:grpSpPr>
           <a:xfrm>
-            <a:off x="10648756" y="5048250"/>
+            <a:off x="8591550" y="5048250"/>
             <a:ext cx="323850" cy="323850"/>
             <a:chOff x="0" y="0"/>
             <a:chExt cx="6350000" cy="6350000"/>
@@ -13246,7 +13246,7 @@
         </p:nvGrpSpPr>
         <p:grpSpPr>
           <a:xfrm>
-            <a:off x="14829198" y="5048250"/>
+            <a:off x="12477750" y="5048250"/>
             <a:ext cx="323850" cy="323850"/>
             <a:chOff x="0" y="0"/>
             <a:chExt cx="6350000" cy="6350000"/>
@@ -13493,7 +13493,7 @@
               <a:blip r:embed="rId2">
                 <a:extLst>
                   <a:ext uri="{96DAC541-7B7A-43D3-8B79-37D633B846F1}">
-                    <asvg:svgBlip xmlns:asvg="http://schemas.microsoft.com/office/drawing/2016/SVG/main" xmlns="" r:embed="rId5"/>
+                    <asvg:svgBlip xmlns="" xmlns:asvg="http://schemas.microsoft.com/office/drawing/2016/SVG/main" r:embed="rId5"/>
                   </a:ext>
                 </a:extLst>
               </a:blip>
@@ -13562,15 +13562,15 @@
         </p:nvSpPr>
         <p:spPr>
           <a:xfrm>
-            <a:off x="816145" y="5853578"/>
-            <a:ext cx="3340688" cy="863763"/>
+            <a:off x="282745" y="5853578"/>
+            <a:ext cx="2928573" cy="436017"/>
           </a:xfrm>
           <a:prstGeom prst="rect">
             <a:avLst/>
           </a:prstGeom>
         </p:spPr>
         <p:txBody>
-          <a:bodyPr lIns="0" tIns="0" rIns="0" bIns="0" rtlCol="0" anchor="t">
+          <a:bodyPr wrap="square" lIns="0" tIns="0" rIns="0" bIns="0" rtlCol="0" anchor="t">
             <a:spAutoFit/>
           </a:bodyPr>
           <a:lstStyle/>
@@ -13584,7 +13584,7 @@
               </a:spcBef>
             </a:pPr>
             <a:r>
-              <a:rPr lang="en-US" sz="2799" b="1" dirty="0" smtClean="0">
+              <a:rPr lang="en-US" sz="2000" b="1" dirty="0" smtClean="0">
                 <a:solidFill>
                   <a:srgbClr val="1CABB0"/>
                 </a:solidFill>
@@ -13596,7 +13596,7 @@
               <a:t>Part_1: </a:t>
             </a:r>
             <a:r>
-              <a:rPr lang="en-US" sz="2799" b="1" dirty="0" err="1" smtClean="0">
+              <a:rPr lang="en-US" sz="2000" b="1" dirty="0" err="1" smtClean="0">
                 <a:solidFill>
                   <a:srgbClr val="1CABB0"/>
                 </a:solidFill>
@@ -13608,7 +13608,7 @@
               <a:t>OpenCV</a:t>
             </a:r>
             <a:r>
-              <a:rPr lang="en-US" sz="2799" b="1" dirty="0" smtClean="0">
+              <a:rPr lang="en-US" sz="2000" b="1" dirty="0" smtClean="0">
                 <a:solidFill>
                   <a:srgbClr val="1CABB0"/>
                 </a:solidFill>
@@ -13619,7 +13619,7 @@
               </a:rPr>
               <a:t> Module</a:t>
             </a:r>
-            <a:endParaRPr lang="en-US" sz="2799" b="1" dirty="0">
+            <a:endParaRPr lang="en-US" sz="2000" b="1" dirty="0">
               <a:solidFill>
                 <a:srgbClr val="1CABB0"/>
               </a:solidFill>
@@ -13639,8 +13639,8 @@
         </p:nvSpPr>
         <p:spPr>
           <a:xfrm>
-            <a:off x="637240" y="6723782"/>
-            <a:ext cx="3706160" cy="3000821"/>
+            <a:off x="103840" y="6723781"/>
+            <a:ext cx="3248960" cy="3039771"/>
           </a:xfrm>
           <a:prstGeom prst="rect">
             <a:avLst/>
@@ -13662,7 +13662,7 @@
               <a:buAutoNum type="arabicPeriod"/>
             </a:pPr>
             <a:r>
-              <a:rPr lang="en-GB" sz="2769" dirty="0" smtClean="0">
+              <a:rPr lang="en-GB" sz="2000" dirty="0" smtClean="0">
                 <a:solidFill>
                   <a:srgbClr val="FEFEFE"/>
                 </a:solidFill>
@@ -13685,7 +13685,7 @@
               <a:buAutoNum type="arabicPeriod"/>
             </a:pPr>
             <a:r>
-              <a:rPr lang="en-GB" sz="2769" dirty="0" smtClean="0">
+              <a:rPr lang="en-GB" sz="2000" dirty="0" smtClean="0">
                 <a:solidFill>
                   <a:srgbClr val="FEFEFE"/>
                 </a:solidFill>
@@ -13707,7 +13707,7 @@
               </a:spcBef>
               <a:buAutoNum type="arabicPeriod"/>
             </a:pPr>
-            <a:endParaRPr lang="en-GB" sz="2000" dirty="0">
+            <a:endParaRPr lang="en-GB" sz="1600" dirty="0">
               <a:solidFill>
                 <a:srgbClr val="FEFEFE"/>
               </a:solidFill>
@@ -13727,7 +13727,7 @@
               </a:spcBef>
             </a:pPr>
             <a:r>
-              <a:rPr lang="en-GB" sz="2400" b="1" dirty="0" smtClean="0">
+              <a:rPr lang="en-GB" b="1" dirty="0" smtClean="0">
                 <a:solidFill>
                   <a:srgbClr val="76CEE4"/>
                 </a:solidFill>
@@ -13739,7 +13739,7 @@
               <a:t>=&gt; </a:t>
             </a:r>
             <a:r>
-              <a:rPr lang="en-GB" sz="2400" b="1" dirty="0" err="1" smtClean="0">
+              <a:rPr lang="en-GB" b="1" dirty="0" err="1" smtClean="0">
                 <a:solidFill>
                   <a:srgbClr val="76CEE4"/>
                 </a:solidFill>
@@ -13751,7 +13751,7 @@
               <a:t>Minahil</a:t>
             </a:r>
             <a:r>
-              <a:rPr lang="en-GB" sz="2400" b="1" dirty="0" smtClean="0">
+              <a:rPr lang="en-GB" b="1" dirty="0" smtClean="0">
                 <a:solidFill>
                   <a:srgbClr val="76CEE4"/>
                 </a:solidFill>
@@ -13762,7 +13762,7 @@
               </a:rPr>
               <a:t> BSSE25045</a:t>
             </a:r>
-            <a:endParaRPr lang="en-US" sz="2000" b="1" dirty="0">
+            <a:endParaRPr lang="en-US" sz="1600" b="1" dirty="0">
               <a:solidFill>
                 <a:srgbClr val="76CEE4"/>
               </a:solidFill>
@@ -13782,15 +13782,15 @@
         </p:nvSpPr>
         <p:spPr>
           <a:xfrm>
-            <a:off x="5069986" y="5876925"/>
-            <a:ext cx="3462134" cy="863763"/>
+            <a:off x="3581400" y="5876925"/>
+            <a:ext cx="3146465" cy="436017"/>
           </a:xfrm>
           <a:prstGeom prst="rect">
             <a:avLst/>
           </a:prstGeom>
         </p:spPr>
         <p:txBody>
-          <a:bodyPr lIns="0" tIns="0" rIns="0" bIns="0" rtlCol="0" anchor="t">
+          <a:bodyPr wrap="square" lIns="0" tIns="0" rIns="0" bIns="0" rtlCol="0" anchor="t">
             <a:spAutoFit/>
           </a:bodyPr>
           <a:lstStyle/>
@@ -13804,7 +13804,7 @@
               </a:spcBef>
             </a:pPr>
             <a:r>
-              <a:rPr lang="en-US" sz="2799" b="1" dirty="0" smtClean="0">
+              <a:rPr lang="en-US" b="1" dirty="0" smtClean="0">
                 <a:solidFill>
                   <a:srgbClr val="1CABB0"/>
                 </a:solidFill>
@@ -13815,7 +13815,7 @@
               </a:rPr>
               <a:t>Part_2: Database Manager</a:t>
             </a:r>
-            <a:endParaRPr lang="en-US" sz="2799" b="1" dirty="0">
+            <a:endParaRPr lang="en-US" b="1" dirty="0">
               <a:solidFill>
                 <a:srgbClr val="1CABB0"/>
               </a:solidFill>
@@ -13835,15 +13835,15 @@
         </p:nvSpPr>
         <p:spPr>
           <a:xfrm>
-            <a:off x="5069986" y="6734157"/>
-            <a:ext cx="3462134" cy="3500958"/>
+            <a:off x="3581400" y="6734157"/>
+            <a:ext cx="3146465" cy="3000821"/>
           </a:xfrm>
           <a:prstGeom prst="rect">
             <a:avLst/>
           </a:prstGeom>
         </p:spPr>
         <p:txBody>
-          <a:bodyPr lIns="0" tIns="0" rIns="0" bIns="0" rtlCol="0" anchor="t">
+          <a:bodyPr wrap="square" lIns="0" tIns="0" rIns="0" bIns="0" rtlCol="0" anchor="t">
             <a:spAutoFit/>
           </a:bodyPr>
           <a:lstStyle/>
@@ -13858,7 +13858,7 @@
               <a:buAutoNum type="arabicPeriod"/>
             </a:pPr>
             <a:r>
-              <a:rPr lang="en-GB" sz="2400" dirty="0" smtClean="0">
+              <a:rPr lang="en-GB" sz="1600" dirty="0" smtClean="0">
                 <a:solidFill>
                   <a:srgbClr val="FEFEFE"/>
                 </a:solidFill>
@@ -13881,7 +13881,7 @@
               <a:buAutoNum type="arabicPeriod"/>
             </a:pPr>
             <a:r>
-              <a:rPr lang="en-GB" sz="2400" dirty="0" smtClean="0">
+              <a:rPr lang="en-GB" sz="1600" dirty="0" smtClean="0">
                 <a:solidFill>
                   <a:srgbClr val="FEFEFE"/>
                 </a:solidFill>
@@ -13902,7 +13902,7 @@
                 <a:spcPct val="0"/>
               </a:spcBef>
             </a:pPr>
-            <a:endParaRPr lang="en-GB" sz="2400" dirty="0" smtClean="0">
+            <a:endParaRPr lang="en-GB" sz="1600" dirty="0" smtClean="0">
               <a:solidFill>
                 <a:srgbClr val="FEFEFE"/>
               </a:solidFill>
@@ -13922,7 +13922,7 @@
               </a:spcBef>
             </a:pPr>
             <a:r>
-              <a:rPr lang="en-GB" sz="2200" b="1" dirty="0" smtClean="0">
+              <a:rPr lang="en-GB" sz="1600" b="1" dirty="0" smtClean="0">
                 <a:solidFill>
                   <a:srgbClr val="76CEE4"/>
                 </a:solidFill>
@@ -13931,21 +13931,9 @@
                 <a:cs typeface="Atkinson Hyperlegible"/>
                 <a:sym typeface="Atkinson Hyperlegible"/>
               </a:rPr>
-              <a:t>=&gt; </a:t>
-            </a:r>
-            <a:r>
-              <a:rPr lang="en-GB" sz="2200" b="1" dirty="0" smtClean="0">
-                <a:solidFill>
-                  <a:srgbClr val="76CEE4"/>
-                </a:solidFill>
-                <a:latin typeface="Atkinson Hyperlegible"/>
-                <a:ea typeface="Atkinson Hyperlegible"/>
-                <a:cs typeface="Atkinson Hyperlegible"/>
-                <a:sym typeface="Atkinson Hyperlegible"/>
-              </a:rPr>
-              <a:t>Muhammad BSSE25002</a:t>
-            </a:r>
-            <a:endParaRPr lang="en-US" sz="2200" b="1" dirty="0">
+              <a:t>=&gt; Muhammad BSSE25002</a:t>
+            </a:r>
+            <a:endParaRPr lang="en-US" sz="1600" b="1" dirty="0">
               <a:solidFill>
                 <a:srgbClr val="76CEE4"/>
               </a:solidFill>
@@ -13965,15 +13953,15 @@
         </p:nvSpPr>
         <p:spPr>
           <a:xfrm>
-            <a:off x="13455964" y="5889879"/>
-            <a:ext cx="3300209" cy="436017"/>
+            <a:off x="10903651" y="5889879"/>
+            <a:ext cx="3190545" cy="436017"/>
           </a:xfrm>
           <a:prstGeom prst="rect">
             <a:avLst/>
           </a:prstGeom>
         </p:spPr>
         <p:txBody>
-          <a:bodyPr lIns="0" tIns="0" rIns="0" bIns="0" rtlCol="0" anchor="t">
+          <a:bodyPr wrap="square" lIns="0" tIns="0" rIns="0" bIns="0" rtlCol="0" anchor="t">
             <a:spAutoFit/>
           </a:bodyPr>
           <a:lstStyle/>
@@ -13987,7 +13975,7 @@
               </a:spcBef>
             </a:pPr>
             <a:r>
-              <a:rPr lang="en-US" sz="2799" b="1" dirty="0" smtClean="0">
+              <a:rPr lang="en-US" b="1" dirty="0" smtClean="0">
                 <a:solidFill>
                   <a:srgbClr val="1CABB0"/>
                 </a:solidFill>
@@ -13996,10 +13984,10 @@
                 <a:cs typeface="Atkinson Hyperlegible Bold"/>
                 <a:sym typeface="Atkinson Hyperlegible Bold"/>
               </a:rPr>
-              <a:t>Part_3: </a:t>
-            </a:r>
-            <a:r>
-              <a:rPr lang="en-US" sz="2799" b="1" dirty="0" err="1" smtClean="0">
+              <a:t>Part_4: </a:t>
+            </a:r>
+            <a:r>
+              <a:rPr lang="en-US" b="1" dirty="0" err="1" smtClean="0">
                 <a:solidFill>
                   <a:srgbClr val="1CABB0"/>
                 </a:solidFill>
@@ -14010,7 +13998,7 @@
               </a:rPr>
               <a:t>GUI+Email</a:t>
             </a:r>
-            <a:endParaRPr lang="en-US" sz="2799" b="1" dirty="0">
+            <a:endParaRPr lang="en-US" b="1" dirty="0">
               <a:solidFill>
                 <a:srgbClr val="1CABB0"/>
               </a:solidFill>
@@ -14030,15 +14018,15 @@
         </p:nvSpPr>
         <p:spPr>
           <a:xfrm>
-            <a:off x="13448913" y="6762732"/>
-            <a:ext cx="3389221" cy="2616101"/>
+            <a:off x="10896600" y="6762732"/>
+            <a:ext cx="3276599" cy="1744067"/>
           </a:xfrm>
           <a:prstGeom prst="rect">
             <a:avLst/>
           </a:prstGeom>
         </p:spPr>
         <p:txBody>
-          <a:bodyPr lIns="0" tIns="0" rIns="0" bIns="0" rtlCol="0" anchor="t">
+          <a:bodyPr wrap="square" lIns="0" tIns="0" rIns="0" bIns="0" rtlCol="0" anchor="t">
             <a:spAutoFit/>
           </a:bodyPr>
           <a:lstStyle/>
@@ -14050,7 +14038,7 @@
               <a:buAutoNum type="arabicPeriod"/>
             </a:pPr>
             <a:r>
-              <a:rPr lang="en-GB" sz="2400" dirty="0" smtClean="0">
+              <a:rPr lang="en-GB" sz="1600" dirty="0" smtClean="0">
                 <a:solidFill>
                   <a:srgbClr val="FEFEFE"/>
                 </a:solidFill>
@@ -14070,7 +14058,7 @@
               <a:buAutoNum type="arabicPeriod"/>
             </a:pPr>
             <a:r>
-              <a:rPr lang="en-GB" sz="2400" dirty="0" smtClean="0">
+              <a:rPr lang="en-GB" sz="1600" dirty="0" smtClean="0">
                 <a:solidFill>
                   <a:srgbClr val="FEFEFE"/>
                 </a:solidFill>
@@ -14089,7 +14077,7 @@
               </a:lnSpc>
               <a:buAutoNum type="arabicPeriod"/>
             </a:pPr>
-            <a:endParaRPr lang="en-GB" sz="2400" dirty="0">
+            <a:endParaRPr lang="en-GB" sz="1600" dirty="0">
               <a:solidFill>
                 <a:srgbClr val="FEFEFE"/>
               </a:solidFill>
@@ -14106,7 +14094,7 @@
               </a:lnSpc>
             </a:pPr>
             <a:r>
-              <a:rPr lang="en-GB" sz="2400" b="1" dirty="0" smtClean="0">
+              <a:rPr lang="en-GB" sz="1600" b="1" dirty="0" smtClean="0">
                 <a:solidFill>
                   <a:srgbClr val="76CEE4"/>
                 </a:solidFill>
@@ -14128,15 +14116,15 @@
         </p:nvSpPr>
         <p:spPr>
           <a:xfrm>
-            <a:off x="9210675" y="5889879"/>
-            <a:ext cx="3485763" cy="436017"/>
+            <a:off x="7086600" y="5889879"/>
+            <a:ext cx="3276600" cy="436017"/>
           </a:xfrm>
           <a:prstGeom prst="rect">
             <a:avLst/>
           </a:prstGeom>
         </p:spPr>
         <p:txBody>
-          <a:bodyPr lIns="0" tIns="0" rIns="0" bIns="0" rtlCol="0" anchor="t">
+          <a:bodyPr wrap="square" lIns="0" tIns="0" rIns="0" bIns="0" rtlCol="0" anchor="t">
             <a:spAutoFit/>
           </a:bodyPr>
           <a:lstStyle/>
@@ -14150,7 +14138,7 @@
               </a:spcBef>
             </a:pPr>
             <a:r>
-              <a:rPr lang="en-US" sz="2799" b="1" dirty="0" smtClean="0">
+              <a:rPr lang="en-US" sz="2000" b="1" dirty="0" smtClean="0">
                 <a:solidFill>
                   <a:srgbClr val="1CABB0"/>
                 </a:solidFill>
@@ -14161,7 +14149,7 @@
               </a:rPr>
               <a:t>Part_3: Finances</a:t>
             </a:r>
-            <a:endParaRPr lang="en-US" sz="2799" b="1" dirty="0">
+            <a:endParaRPr lang="en-US" sz="2000" b="1" dirty="0">
               <a:solidFill>
                 <a:srgbClr val="1CABB0"/>
               </a:solidFill>
@@ -14181,15 +14169,15 @@
         </p:nvSpPr>
         <p:spPr>
           <a:xfrm>
-            <a:off x="9210675" y="6762732"/>
-            <a:ext cx="3485763" cy="3000821"/>
+            <a:off x="7086600" y="6762732"/>
+            <a:ext cx="3276600" cy="2500685"/>
           </a:xfrm>
           <a:prstGeom prst="rect">
             <a:avLst/>
           </a:prstGeom>
         </p:spPr>
         <p:txBody>
-          <a:bodyPr lIns="0" tIns="0" rIns="0" bIns="0" rtlCol="0" anchor="t">
+          <a:bodyPr wrap="square" lIns="0" tIns="0" rIns="0" bIns="0" rtlCol="0" anchor="t">
             <a:spAutoFit/>
           </a:bodyPr>
           <a:lstStyle/>
@@ -14201,7 +14189,7 @@
               <a:buAutoNum type="arabicPeriod"/>
             </a:pPr>
             <a:r>
-              <a:rPr lang="en-GB" sz="2769" dirty="0" smtClean="0">
+              <a:rPr lang="en-GB" sz="2000" dirty="0" smtClean="0">
                 <a:solidFill>
                   <a:srgbClr val="FEFEFE"/>
                 </a:solidFill>
@@ -14221,7 +14209,7 @@
               <a:buAutoNum type="arabicPeriod"/>
             </a:pPr>
             <a:r>
-              <a:rPr lang="en-GB" sz="2769" dirty="0" smtClean="0">
+              <a:rPr lang="en-GB" sz="2000" dirty="0" smtClean="0">
                 <a:solidFill>
                   <a:srgbClr val="FEFEFE"/>
                 </a:solidFill>
@@ -14240,7 +14228,7 @@
               </a:lnSpc>
               <a:buAutoNum type="arabicPeriod"/>
             </a:pPr>
-            <a:endParaRPr lang="en-GB" sz="2000" dirty="0">
+            <a:endParaRPr lang="en-GB" sz="1600" dirty="0">
               <a:solidFill>
                 <a:srgbClr val="FEFEFE"/>
               </a:solidFill>
@@ -14257,7 +14245,7 @@
               </a:lnSpc>
             </a:pPr>
             <a:r>
-              <a:rPr lang="en-GB" sz="2400" b="1" dirty="0" smtClean="0">
+              <a:rPr lang="en-GB" b="1" dirty="0" smtClean="0">
                 <a:solidFill>
                   <a:srgbClr val="76CEE4"/>
                 </a:solidFill>
@@ -14269,7 +14257,7 @@
               <a:t>=&gt; </a:t>
             </a:r>
             <a:r>
-              <a:rPr lang="en-GB" sz="2400" b="1" dirty="0" err="1" smtClean="0">
+              <a:rPr lang="en-GB" b="1" dirty="0" err="1" smtClean="0">
                 <a:solidFill>
                   <a:srgbClr val="76CEE4"/>
                 </a:solidFill>
@@ -14281,7 +14269,7 @@
               <a:t>Eman</a:t>
             </a:r>
             <a:r>
-              <a:rPr lang="en-GB" sz="2400" b="1" dirty="0" smtClean="0">
+              <a:rPr lang="en-GB" b="1" dirty="0" smtClean="0">
                 <a:solidFill>
                   <a:srgbClr val="76CEE4"/>
                 </a:solidFill>
@@ -14303,7 +14291,7 @@
         </p:nvSpPr>
         <p:spPr>
           <a:xfrm>
-            <a:off x="4641985" y="5485434"/>
+            <a:off x="3352800" y="5485434"/>
             <a:ext cx="0" cy="4522588"/>
           </a:xfrm>
           <a:prstGeom prst="line">
@@ -14327,7 +14315,7 @@
         </p:nvSpPr>
         <p:spPr>
           <a:xfrm>
-            <a:off x="8776148" y="5485434"/>
+            <a:off x="6781800" y="5485434"/>
             <a:ext cx="0" cy="4522588"/>
           </a:xfrm>
           <a:prstGeom prst="line">
@@ -14351,7 +14339,7 @@
         </p:nvSpPr>
         <p:spPr>
           <a:xfrm>
-            <a:off x="13106400" y="5485434"/>
+            <a:off x="10591800" y="5485434"/>
             <a:ext cx="0" cy="4522588"/>
           </a:xfrm>
           <a:prstGeom prst="line">
@@ -14428,7 +14416,7 @@
                   </a14:imgProps>
                 </a:ext>
                 <a:ext uri="{96DAC541-7B7A-43D3-8B79-37D633B846F1}">
-                  <asvg:svgBlip xmlns:asvg="http://schemas.microsoft.com/office/drawing/2016/SVG/main" xmlns="" r:embed="rId3"/>
+                  <asvg:svgBlip xmlns="" xmlns:asvg="http://schemas.microsoft.com/office/drawing/2016/SVG/main" r:embed="rId3"/>
                 </a:ext>
               </a:extLst>
             </a:blip>
@@ -14497,7 +14485,7 @@
                   </a14:imgProps>
                 </a:ext>
                 <a:ext uri="{96DAC541-7B7A-43D3-8B79-37D633B846F1}">
-                  <asvg:svgBlip xmlns:asvg="http://schemas.microsoft.com/office/drawing/2016/SVG/main" xmlns="" r:embed="rId3"/>
+                  <asvg:svgBlip xmlns="" xmlns:asvg="http://schemas.microsoft.com/office/drawing/2016/SVG/main" r:embed="rId3"/>
                 </a:ext>
               </a:extLst>
             </a:blip>
@@ -14565,7 +14553,7 @@
                   </a14:imgProps>
                 </a:ext>
                 <a:ext uri="{96DAC541-7B7A-43D3-8B79-37D633B846F1}">
-                  <asvg:svgBlip xmlns:asvg="http://schemas.microsoft.com/office/drawing/2016/SVG/main" xmlns="" r:embed="rId3"/>
+                  <asvg:svgBlip xmlns="" xmlns:asvg="http://schemas.microsoft.com/office/drawing/2016/SVG/main" r:embed="rId3"/>
                 </a:ext>
               </a:extLst>
             </a:blip>
@@ -14573,6 +14561,270 @@
               <a:fillRect/>
             </a:stretch>
           </a:blipFill>
+        </p:spPr>
+      </p:sp>
+      <p:grpSp>
+        <p:nvGrpSpPr>
+          <p:cNvPr id="43" name="Group 9"/>
+          <p:cNvGrpSpPr/>
+          <p:nvPr/>
+        </p:nvGrpSpPr>
+        <p:grpSpPr>
+          <a:xfrm>
+            <a:off x="16211550" y="5200650"/>
+            <a:ext cx="323850" cy="323850"/>
+            <a:chOff x="0" y="0"/>
+            <a:chExt cx="6350000" cy="6350000"/>
+          </a:xfrm>
+          <a:solidFill>
+            <a:srgbClr val="1CABB0"/>
+          </a:solidFill>
+        </p:grpSpPr>
+        <p:sp>
+          <p:nvSpPr>
+            <p:cNvPr id="44" name="Freeform 10"/>
+            <p:cNvSpPr/>
+            <p:nvPr/>
+          </p:nvSpPr>
+          <p:spPr>
+            <a:xfrm>
+              <a:off x="0" y="0"/>
+              <a:ext cx="6350000" cy="6350000"/>
+            </a:xfrm>
+            <a:custGeom>
+              <a:avLst/>
+              <a:gdLst/>
+              <a:ahLst/>
+              <a:cxnLst/>
+              <a:rect l="l" t="t" r="r" b="b"/>
+              <a:pathLst>
+                <a:path w="6350000" h="6350000">
+                  <a:moveTo>
+                    <a:pt x="3175000" y="0"/>
+                  </a:moveTo>
+                  <a:cubicBezTo>
+                    <a:pt x="1421496" y="0"/>
+                    <a:pt x="0" y="1421496"/>
+                    <a:pt x="0" y="3175000"/>
+                  </a:cubicBezTo>
+                  <a:cubicBezTo>
+                    <a:pt x="0" y="4928504"/>
+                    <a:pt x="1421496" y="6350000"/>
+                    <a:pt x="3175000" y="6350000"/>
+                  </a:cubicBezTo>
+                  <a:cubicBezTo>
+                    <a:pt x="4928504" y="6350000"/>
+                    <a:pt x="6350000" y="4928504"/>
+                    <a:pt x="6350000" y="3175000"/>
+                  </a:cubicBezTo>
+                  <a:cubicBezTo>
+                    <a:pt x="6350000" y="1421496"/>
+                    <a:pt x="4928504" y="0"/>
+                    <a:pt x="3175000" y="0"/>
+                  </a:cubicBezTo>
+                  <a:close/>
+                </a:path>
+              </a:pathLst>
+            </a:custGeom>
+            <a:grpFill/>
+          </p:spPr>
+        </p:sp>
+      </p:grpSp>
+      <p:sp>
+        <p:nvSpPr>
+          <p:cNvPr id="45" name="TextBox 23"/>
+          <p:cNvSpPr txBox="1"/>
+          <p:nvPr/>
+        </p:nvSpPr>
+        <p:spPr>
+          <a:xfrm>
+            <a:off x="14612257" y="5838821"/>
+            <a:ext cx="3190545" cy="827791"/>
+          </a:xfrm>
+          <a:prstGeom prst="rect">
+            <a:avLst/>
+          </a:prstGeom>
+        </p:spPr>
+        <p:txBody>
+          <a:bodyPr wrap="square" lIns="0" tIns="0" rIns="0" bIns="0" rtlCol="0" anchor="t">
+            <a:spAutoFit/>
+          </a:bodyPr>
+          <a:lstStyle/>
+          <a:p>
+            <a:pPr marL="0" lvl="0" indent="0" algn="l">
+              <a:lnSpc>
+                <a:spcPts val="3359"/>
+              </a:lnSpc>
+              <a:spcBef>
+                <a:spcPct val="0"/>
+              </a:spcBef>
+            </a:pPr>
+            <a:r>
+              <a:rPr lang="en-US" b="1" dirty="0" smtClean="0">
+                <a:solidFill>
+                  <a:srgbClr val="1CABB0"/>
+                </a:solidFill>
+                <a:latin typeface="Atkinson Hyperlegible Bold"/>
+                <a:ea typeface="Atkinson Hyperlegible Bold"/>
+                <a:cs typeface="Atkinson Hyperlegible Bold"/>
+                <a:sym typeface="Atkinson Hyperlegible Bold"/>
+              </a:rPr>
+              <a:t>Part_5: Individual Records Analysis</a:t>
+            </a:r>
+            <a:endParaRPr lang="en-US" b="1" dirty="0">
+              <a:solidFill>
+                <a:srgbClr val="1CABB0"/>
+              </a:solidFill>
+              <a:latin typeface="Atkinson Hyperlegible Bold"/>
+              <a:ea typeface="Atkinson Hyperlegible Bold"/>
+              <a:cs typeface="Atkinson Hyperlegible Bold"/>
+              <a:sym typeface="Atkinson Hyperlegible Bold"/>
+            </a:endParaRPr>
+          </a:p>
+        </p:txBody>
+      </p:sp>
+      <p:sp>
+        <p:nvSpPr>
+          <p:cNvPr id="46" name="TextBox 24"/>
+          <p:cNvSpPr txBox="1"/>
+          <p:nvPr/>
+        </p:nvSpPr>
+        <p:spPr>
+          <a:xfrm>
+            <a:off x="14557005" y="6762731"/>
+            <a:ext cx="3276599" cy="2180084"/>
+          </a:xfrm>
+          <a:prstGeom prst="rect">
+            <a:avLst/>
+          </a:prstGeom>
+        </p:spPr>
+        <p:txBody>
+          <a:bodyPr wrap="square" lIns="0" tIns="0" rIns="0" bIns="0" rtlCol="0" anchor="t">
+            <a:spAutoFit/>
+          </a:bodyPr>
+          <a:lstStyle/>
+          <a:p>
+            <a:pPr marL="457200" indent="-457200" algn="l">
+              <a:lnSpc>
+                <a:spcPts val="3359"/>
+              </a:lnSpc>
+              <a:buAutoNum type="arabicPeriod"/>
+            </a:pPr>
+            <a:r>
+              <a:rPr lang="en-GB" sz="1600" dirty="0" smtClean="0">
+                <a:solidFill>
+                  <a:srgbClr val="FEFEFE"/>
+                </a:solidFill>
+                <a:latin typeface="Atkinson Hyperlegible"/>
+                <a:ea typeface="Atkinson Hyperlegible"/>
+                <a:cs typeface="Atkinson Hyperlegible"/>
+                <a:sym typeface="Atkinson Hyperlegible"/>
+              </a:rPr>
+              <a:t>Analysis of Records of generated Challans for Individuals.</a:t>
+            </a:r>
+            <a:endParaRPr lang="en-GB" sz="1600" dirty="0" smtClean="0">
+              <a:solidFill>
+                <a:srgbClr val="FEFEFE"/>
+              </a:solidFill>
+              <a:latin typeface="Atkinson Hyperlegible"/>
+              <a:ea typeface="Atkinson Hyperlegible"/>
+              <a:cs typeface="Atkinson Hyperlegible"/>
+              <a:sym typeface="Atkinson Hyperlegible"/>
+            </a:endParaRPr>
+          </a:p>
+          <a:p>
+            <a:pPr marL="457200" indent="-457200" algn="l">
+              <a:lnSpc>
+                <a:spcPts val="3359"/>
+              </a:lnSpc>
+              <a:buAutoNum type="arabicPeriod"/>
+            </a:pPr>
+            <a:endParaRPr lang="en-GB" sz="1600" dirty="0">
+              <a:solidFill>
+                <a:srgbClr val="FEFEFE"/>
+              </a:solidFill>
+              <a:latin typeface="Atkinson Hyperlegible"/>
+              <a:ea typeface="Atkinson Hyperlegible"/>
+              <a:cs typeface="Atkinson Hyperlegible"/>
+              <a:sym typeface="Atkinson Hyperlegible"/>
+            </a:endParaRPr>
+          </a:p>
+          <a:p>
+            <a:pPr algn="ctr">
+              <a:lnSpc>
+                <a:spcPts val="3359"/>
+              </a:lnSpc>
+            </a:pPr>
+            <a:r>
+              <a:rPr lang="en-GB" sz="1600" b="1" dirty="0" smtClean="0">
+                <a:solidFill>
+                  <a:srgbClr val="76CEE4"/>
+                </a:solidFill>
+                <a:latin typeface="Atkinson Hyperlegible"/>
+                <a:ea typeface="Atkinson Hyperlegible"/>
+                <a:cs typeface="Atkinson Hyperlegible"/>
+                <a:sym typeface="Atkinson Hyperlegible"/>
+              </a:rPr>
+              <a:t>=&gt; </a:t>
+            </a:r>
+            <a:r>
+              <a:rPr lang="en-GB" sz="1600" b="1" dirty="0" err="1" smtClean="0">
+                <a:solidFill>
+                  <a:srgbClr val="76CEE4"/>
+                </a:solidFill>
+                <a:latin typeface="Atkinson Hyperlegible"/>
+                <a:ea typeface="Atkinson Hyperlegible"/>
+                <a:cs typeface="Atkinson Hyperlegible"/>
+                <a:sym typeface="Atkinson Hyperlegible"/>
+              </a:rPr>
+              <a:t>Rafay</a:t>
+            </a:r>
+            <a:r>
+              <a:rPr lang="en-GB" sz="1600" b="1" dirty="0" smtClean="0">
+                <a:solidFill>
+                  <a:srgbClr val="76CEE4"/>
+                </a:solidFill>
+                <a:latin typeface="Atkinson Hyperlegible"/>
+                <a:ea typeface="Atkinson Hyperlegible"/>
+                <a:cs typeface="Atkinson Hyperlegible"/>
+                <a:sym typeface="Atkinson Hyperlegible"/>
+              </a:rPr>
+              <a:t> BSSE25037</a:t>
+            </a:r>
+            <a:endParaRPr lang="en-GB" sz="1600" b="1" dirty="0" smtClean="0">
+              <a:solidFill>
+                <a:srgbClr val="76CEE4"/>
+              </a:solidFill>
+              <a:latin typeface="Atkinson Hyperlegible"/>
+              <a:ea typeface="Atkinson Hyperlegible"/>
+              <a:cs typeface="Atkinson Hyperlegible"/>
+              <a:sym typeface="Atkinson Hyperlegible"/>
+            </a:endParaRPr>
+          </a:p>
+        </p:txBody>
+      </p:sp>
+      <p:sp>
+        <p:nvSpPr>
+          <p:cNvPr id="47" name="AutoShape 29"/>
+          <p:cNvSpPr/>
+          <p:nvPr/>
+        </p:nvSpPr>
+        <p:spPr>
+          <a:xfrm>
+            <a:off x="14325600" y="5524500"/>
+            <a:ext cx="0" cy="4522588"/>
+          </a:xfrm>
+          <a:prstGeom prst="line">
+            <a:avLst/>
+          </a:prstGeom>
+          <a:ln w="76200" cap="flat">
+            <a:solidFill>
+              <a:srgbClr val="1CABB0"/>
+            </a:solidFill>
+            <a:prstDash val="solid"/>
+            <a:headEnd type="none" w="sm" len="sm"/>
+            <a:tailEnd type="none" w="sm" len="sm"/>
+          </a:ln>
         </p:spPr>
       </p:sp>
     </p:spTree>
